--- a/FIG-TESPN社會科教學包_工作坊簡報_8頁精簡版.pptx
+++ b/FIG-TESPN社會科教學包_工作坊簡報_8頁精簡版.pptx
@@ -2566,7 +2566,7 @@
                 <a:ea typeface="Calibri" pitchFamily="34" charset="-122"/>
                 <a:cs typeface="Calibri" pitchFamily="34" charset="-120"/>
               </a:rPr>
-              <a:t>五年級歷史分量重，進度壓力大</a:t>
+              <a:t>高年級歷史分量重，進度壓力大</a:t>
             </a:r>
             <a:endParaRPr lang="en-US" sz="1550" dirty="0"/>
           </a:p>
